--- a/learning_and_plasticity/learning_and_plasticity_lecture_1.pptx
+++ b/learning_and_plasticity/learning_and_plasticity_lecture_1.pptx
@@ -5719,7 +5719,7 @@
                 </a:solidFill>
                 <a:latin typeface="Calibri"/>
               </a:rPr>
-              <a:t>Lecture 5.1 — The Advantage of Changing Within a Lifetime</a:t>
+              <a:t>Lecture 5.1 — The Evolutionary Advantage of Learning</a:t>
             </a:r>
           </a:p>
         </p:txBody>
